--- a/dataset/guides_final/SEC/guide/IT-SEC-001_피싱·의심 메일 대응 가이드.pptx
+++ b/dataset/guides_final/SEC/guide/IT-SEC-001_피싱·의심 메일 대응 가이드.pptx
@@ -3244,7 +3244,7 @@
                 <a:ea typeface="Malgun Gothic"/>
                 <a:cs typeface="Malgun Gothic"/>
               </a:rPr>
-              <a:t>한화시스템 ICT 임직원 IT 안내 · 정보보안</a:t>
+              <a:t>가상 ICT 기업 임직원 IT 안내 · 정보보안</a:t>
             </a:r>
           </a:p>
         </p:txBody>
@@ -3476,7 +3476,7 @@
                 <a:ea typeface="Malgun Gothic"/>
                 <a:cs typeface="Malgun Gothic"/>
               </a:rPr>
-              <a:t>© HANWHA SYSTEMS ICT · IT-SEC-001 · 사내 일반</a:t>
+              <a:t>© 가상 ICT 기업 · IT-SEC-001 · 사내 일반</a:t>
             </a:r>
           </a:p>
         </p:txBody>
@@ -5727,7 +5727,7 @@
                 <a:ea typeface="Malgun Gothic"/>
                 <a:cs typeface="Malgun Gothic"/>
               </a:rPr>
-              <a:t>© HANWHA SYSTEMS ICT · IT-SEC-001 · 사내 일반</a:t>
+              <a:t>© 가상 ICT 기업 · IT-SEC-001 · 사내 일반</a:t>
             </a:r>
           </a:p>
         </p:txBody>
@@ -7720,7 +7720,7 @@
                 <a:ea typeface="Malgun Gothic"/>
                 <a:cs typeface="Malgun Gothic"/>
               </a:rPr>
-              <a:t>© HANWHA SYSTEMS ICT · IT-SEC-001 · 사내 일반</a:t>
+              <a:t>© 가상 ICT 기업 · IT-SEC-001 · 사내 일반</a:t>
             </a:r>
           </a:p>
         </p:txBody>
@@ -9387,7 +9387,7 @@
                 <a:ea typeface="Malgun Gothic"/>
                 <a:cs typeface="Malgun Gothic"/>
               </a:rPr>
-              <a:t>© HANWHA SYSTEMS ICT · IT-SEC-001 · 사내 일반</a:t>
+              <a:t>© 가상 ICT 기업 · IT-SEC-001 · 사내 일반</a:t>
             </a:r>
           </a:p>
         </p:txBody>
@@ -11358,7 +11358,7 @@
                 <a:ea typeface="Malgun Gothic"/>
                 <a:cs typeface="Malgun Gothic"/>
               </a:rPr>
-              <a:t>© HANWHA SYSTEMS ICT · IT-SEC-001 · 사내 일반</a:t>
+              <a:t>© 가상 ICT 기업 · IT-SEC-001 · 사내 일반</a:t>
             </a:r>
           </a:p>
         </p:txBody>
@@ -12932,7 +12932,7 @@
                 <a:ea typeface="Malgun Gothic"/>
                 <a:cs typeface="Malgun Gothic"/>
               </a:rPr>
-              <a:t>© HANWHA SYSTEMS ICT · IT-SEC-001 · 사내 일반</a:t>
+              <a:t>© 가상 ICT 기업 · IT-SEC-001 · 사내 일반</a:t>
             </a:r>
           </a:p>
         </p:txBody>
@@ -15032,7 +15032,7 @@
                 <a:ea typeface="Malgun Gothic"/>
                 <a:cs typeface="Malgun Gothic"/>
               </a:rPr>
-              <a:t>© HANWHA SYSTEMS ICT · IT-SEC-001 · 사내 일반</a:t>
+              <a:t>© 가상 ICT 기업 · IT-SEC-001 · 사내 일반</a:t>
             </a:r>
           </a:p>
         </p:txBody>
@@ -16676,7 +16676,7 @@
                 <a:ea typeface="Malgun Gothic"/>
                 <a:cs typeface="Malgun Gothic"/>
               </a:rPr>
-              <a:t>© HANWHA SYSTEMS ICT · IT-SEC-001 · 사내 일반</a:t>
+              <a:t>© 가상 ICT 기업 · IT-SEC-001 · 사내 일반</a:t>
             </a:r>
           </a:p>
         </p:txBody>
@@ -18157,7 +18157,7 @@
                 <a:ea typeface="Malgun Gothic"/>
                 <a:cs typeface="Malgun Gothic"/>
               </a:rPr>
-              <a:t>비밀번호 재설정 포털(password.hanwha-ict.example)에서 비밀번호를</a:t>
+              <a:t>비밀번호 재설정 포털(password.ict.example)에서 비밀번호를 바로</a:t>
             </a:r>
           </a:p>
           <a:p>
@@ -18181,7 +18181,7 @@
                 <a:ea typeface="Malgun Gothic"/>
                 <a:cs typeface="Malgun Gothic"/>
               </a:rPr>
-              <a:t>바로 바꿉니다. 첨부파일도 열었다면 다른 기기에서 바꿉니다.</a:t>
+              <a:t>바꿉니다. 첨부파일도 열었다면 다른 기기에서 바꿉니다.</a:t>
             </a:r>
           </a:p>
         </p:txBody>
@@ -18671,7 +18671,7 @@
                 <a:ea typeface="Malgun Gothic"/>
                 <a:cs typeface="Malgun Gothic"/>
               </a:rPr>
-              <a:t>© HANWHA SYSTEMS ICT · IT-SEC-001 · 사내 일반</a:t>
+              <a:t>© 가상 ICT 기업 · IT-SEC-001 · 사내 일반</a:t>
             </a:r>
           </a:p>
         </p:txBody>
@@ -20358,7 +20358,7 @@
                 <a:ea typeface="Malgun Gothic"/>
                 <a:cs typeface="Malgun Gothic"/>
               </a:rPr>
-              <a:t>© HANWHA SYSTEMS ICT · IT-SEC-001 · 사내 일반</a:t>
+              <a:t>© 가상 ICT 기업 · IT-SEC-001 · 사내 일반</a:t>
             </a:r>
           </a:p>
         </p:txBody>
@@ -22471,7 +22471,7 @@
                 <a:ea typeface="Malgun Gothic"/>
                 <a:cs typeface="Malgun Gothic"/>
               </a:rPr>
-              <a:t>© HANWHA SYSTEMS ICT · IT-SEC-001 · 사내 일반</a:t>
+              <a:t>© 가상 ICT 기업 · IT-SEC-001 · 사내 일반</a:t>
             </a:r>
           </a:p>
         </p:txBody>
@@ -24276,7 +24276,7 @@
                 <a:ea typeface="Malgun Gothic"/>
                 <a:cs typeface="Malgun Gothic"/>
               </a:rPr>
-              <a:t>© HANWHA SYSTEMS ICT · IT-SEC-001 · 사내 일반</a:t>
+              <a:t>© 가상 ICT 기업 · IT-SEC-001 · 사내 일반</a:t>
             </a:r>
           </a:p>
         </p:txBody>
@@ -25826,7 +25826,7 @@
                 <a:ea typeface="Malgun Gothic"/>
                 <a:cs typeface="Malgun Gothic"/>
               </a:rPr>
-              <a:t>© HANWHA SYSTEMS ICT · IT-SEC-001 · 사내 일반</a:t>
+              <a:t>© 가상 ICT 기업 · IT-SEC-001 · 사내 일반</a:t>
             </a:r>
           </a:p>
         </p:txBody>
@@ -27735,7 +27735,7 @@
                 <a:ea typeface="Malgun Gothic"/>
                 <a:cs typeface="Malgun Gothic"/>
               </a:rPr>
-              <a:t>© HANWHA SYSTEMS ICT · IT-SEC-001 · 사내 일반</a:t>
+              <a:t>© 가상 ICT 기업 · IT-SEC-001 · 사내 일반</a:t>
             </a:r>
           </a:p>
         </p:txBody>
@@ -29262,7 +29262,7 @@
                 <a:ea typeface="Malgun Gothic"/>
                 <a:cs typeface="Malgun Gothic"/>
               </a:rPr>
-              <a:t>© HANWHA SYSTEMS ICT · IT-SEC-001 · 사내 일반</a:t>
+              <a:t>© 가상 ICT 기업 · IT-SEC-001 · 사내 일반</a:t>
             </a:r>
           </a:p>
         </p:txBody>
@@ -29510,7 +29510,7 @@
                 <a:ea typeface="Malgun Gothic"/>
                 <a:cs typeface="Malgun Gothic"/>
               </a:rPr>
-              <a:t>© HANWHA SYSTEMS ICT · IT-SEC-001 · 사내 일반</a:t>
+              <a:t>© 가상 ICT 기업 · IT-SEC-001 · 사내 일반</a:t>
             </a:r>
           </a:p>
         </p:txBody>
@@ -30475,7 +30475,7 @@
                 <a:ea typeface="Malgun Gothic"/>
                 <a:cs typeface="Malgun Gothic"/>
               </a:rPr>
-              <a:t>© HANWHA SYSTEMS ICT · IT-SEC-001 · 사내 일반</a:t>
+              <a:t>© 가상 ICT 기업 · IT-SEC-001 · 사내 일반</a:t>
             </a:r>
           </a:p>
         </p:txBody>
@@ -30723,7 +30723,7 @@
                 <a:ea typeface="Malgun Gothic"/>
                 <a:cs typeface="Malgun Gothic"/>
               </a:rPr>
-              <a:t>© HANWHA SYSTEMS ICT · IT-SEC-001 · 사내 일반</a:t>
+              <a:t>© 가상 ICT 기업 · IT-SEC-001 · 사내 일반</a:t>
             </a:r>
           </a:p>
         </p:txBody>
@@ -31568,7 +31568,7 @@
                 <a:ea typeface="Malgun Gothic"/>
                 <a:cs typeface="Malgun Gothic"/>
               </a:rPr>
-              <a:t>© HANWHA SYSTEMS ICT · IT-SEC-001 · 사내 일반</a:t>
+              <a:t>© 가상 ICT 기업 · IT-SEC-001 · 사내 일반</a:t>
             </a:r>
           </a:p>
         </p:txBody>
@@ -31816,7 +31816,7 @@
                 <a:ea typeface="Malgun Gothic"/>
                 <a:cs typeface="Malgun Gothic"/>
               </a:rPr>
-              <a:t>© HANWHA SYSTEMS ICT · IT-SEC-001 · 사내 일반</a:t>
+              <a:t>© 가상 ICT 기업 · IT-SEC-001 · 사내 일반</a:t>
             </a:r>
           </a:p>
         </p:txBody>
@@ -32328,7 +32328,7 @@
                           <a:ea typeface="Malgun Gothic"/>
                           <a:cs typeface="Malgun Gothic"/>
                         </a:rPr>
-                        <a:t>사내 IT 포털(hanwha-admin) 상단 [챗봇 문의]</a:t>
+                        <a:t>사내 IT 포털 상단 [챗봇 문의]</a:t>
                       </a:r>
                     </a:p>
                   </a:txBody>
@@ -33020,7 +33020,7 @@
                           <a:ea typeface="Malgun Gothic"/>
                           <a:cs typeface="Malgun Gothic"/>
                         </a:rPr>
-                        <a:t>it-helpdesk@hanwha-ict.example</a:t>
+                        <a:t>it-helpdesk@ict.example</a:t>
                       </a:r>
                     </a:p>
                   </a:txBody>
@@ -33319,7 +33319,7 @@
                 <a:ea typeface="Malgun Gothic"/>
                 <a:cs typeface="Malgun Gothic"/>
               </a:rPr>
-              <a:t>© HANWHA SYSTEMS ICT · IT-SEC-001 · 사내 일반</a:t>
+              <a:t>© 가상 ICT 기업 · IT-SEC-001 · 사내 일반</a:t>
             </a:r>
           </a:p>
         </p:txBody>
@@ -33567,7 +33567,7 @@
                 <a:ea typeface="Malgun Gothic"/>
                 <a:cs typeface="Malgun Gothic"/>
               </a:rPr>
-              <a:t>© HANWHA SYSTEMS ICT · IT-SEC-001 · 사내 일반</a:t>
+              <a:t>© 가상 ICT 기업 · IT-SEC-001 · 사내 일반</a:t>
             </a:r>
           </a:p>
         </p:txBody>
@@ -34843,7 +34843,7 @@
                 <a:ea typeface="Malgun Gothic"/>
                 <a:cs typeface="Malgun Gothic"/>
               </a:rPr>
-              <a:t>© HANWHA SYSTEMS ICT · IT-SEC-001 · 사내 일반</a:t>
+              <a:t>© 가상 ICT 기업 · IT-SEC-001 · 사내 일반</a:t>
             </a:r>
           </a:p>
         </p:txBody>
@@ -37226,7 +37226,7 @@
                 <a:ea typeface="Malgun Gothic"/>
                 <a:cs typeface="Malgun Gothic"/>
               </a:rPr>
-              <a:t>© HANWHA SYSTEMS ICT · IT-SEC-001 · 사내 일반</a:t>
+              <a:t>© 가상 ICT 기업 · IT-SEC-001 · 사내 일반</a:t>
             </a:r>
           </a:p>
         </p:txBody>
@@ -38203,7 +38203,7 @@
                 <a:ea typeface="Malgun Gothic"/>
                 <a:cs typeface="Malgun Gothic"/>
               </a:rPr>
-              <a:t>© HANWHA SYSTEMS ICT · IT-SEC-001 · 사내 일반</a:t>
+              <a:t>© 가상 ICT 기업 · IT-SEC-001 · 사내 일반</a:t>
             </a:r>
           </a:p>
         </p:txBody>
@@ -38451,7 +38451,7 @@
                 <a:ea typeface="Malgun Gothic"/>
                 <a:cs typeface="Malgun Gothic"/>
               </a:rPr>
-              <a:t>© HANWHA SYSTEMS ICT · IT-SEC-001 · 사내 일반</a:t>
+              <a:t>© 가상 ICT 기업 · IT-SEC-001 · 사내 일반</a:t>
             </a:r>
           </a:p>
         </p:txBody>
@@ -40099,7 +40099,7 @@
                 <a:ea typeface="Malgun Gothic"/>
                 <a:cs typeface="Malgun Gothic"/>
               </a:rPr>
-              <a:t>© HANWHA SYSTEMS ICT · IT-SEC-001 · 사내 일반</a:t>
+              <a:t>© 가상 ICT 기업 · IT-SEC-001 · 사내 일반</a:t>
             </a:r>
           </a:p>
         </p:txBody>
@@ -40347,7 +40347,7 @@
                 <a:ea typeface="Malgun Gothic"/>
                 <a:cs typeface="Malgun Gothic"/>
               </a:rPr>
-              <a:t>© HANWHA SYSTEMS ICT · IT-SEC-001 · 사내 일반</a:t>
+              <a:t>© 가상 ICT 기업 · IT-SEC-001 · 사내 일반</a:t>
             </a:r>
           </a:p>
         </p:txBody>
@@ -40840,7 +40840,7 @@
                 <a:ea typeface="Malgun Gothic"/>
                 <a:cs typeface="Malgun Gothic"/>
               </a:rPr>
-              <a:t>회사 메일 주소는 hanwha-ict.example로 끝납니다. 철자가 비슷한 주소(예: hanvva-ict)는 외부 메일입니다.</a:t>
+              <a:t>회사 메일 주소는 ict.example로 끝납니다. 철자가 비슷한 주소(예: hanvva-ict)는 외부 메일입니다.</a:t>
             </a:r>
           </a:p>
         </p:txBody>
@@ -42208,7 +42208,7 @@
                 <a:ea typeface="Malgun Gothic"/>
                 <a:cs typeface="Malgun Gothic"/>
               </a:rPr>
-              <a:t>© HANWHA SYSTEMS ICT · IT-SEC-001 · 사내 일반</a:t>
+              <a:t>© 가상 ICT 기업 · IT-SEC-001 · 사내 일반</a:t>
             </a:r>
           </a:p>
         </p:txBody>
@@ -44068,7 +44068,7 @@
                 <a:ea typeface="Malgun Gothic"/>
                 <a:cs typeface="Malgun Gothic"/>
               </a:rPr>
-              <a:t>© HANWHA SYSTEMS ICT · IT-SEC-001 · 사내 일반</a:t>
+              <a:t>© 가상 ICT 기업 · IT-SEC-001 · 사내 일반</a:t>
             </a:r>
           </a:p>
         </p:txBody>
@@ -44316,7 +44316,7 @@
                 <a:ea typeface="Malgun Gothic"/>
                 <a:cs typeface="Malgun Gothic"/>
               </a:rPr>
-              <a:t>© HANWHA SYSTEMS ICT · IT-SEC-001 · 사내 일반</a:t>
+              <a:t>© 가상 ICT 기업 · IT-SEC-001 · 사내 일반</a:t>
             </a:r>
           </a:p>
         </p:txBody>
